--- a/slides/2-6_neuromuscular_monitor/2-6_neuromuscular_monitor.pptx
+++ b/slides/2-6_neuromuscular_monitor/2-6_neuromuscular_monitor.pptx
@@ -2236,7 +2236,7 @@
           <a:ln/>
         </p:spPr>
         <p:txBody>
-          <a:bodyPr wrap="square" lIns="0" tIns="0" rIns="0" bIns="0" rtlCol="0" anchor="ctr"/>
+          <a:bodyPr wrap="none" lIns="0" tIns="0" rIns="0" bIns="0" rtlCol="0" anchor="ctr"/>
           <a:lstStyle/>
           <a:p>
             <a:pPr algn="ctr" indent="0" marL="0">
@@ -2279,7 +2279,7 @@
           <a:ln/>
         </p:spPr>
         <p:txBody>
-          <a:bodyPr wrap="square" lIns="0" tIns="0" rIns="0" bIns="0" rtlCol="0" anchor="ctr"/>
+          <a:bodyPr wrap="none" lIns="0" tIns="0" rIns="0" bIns="0" rtlCol="0" anchor="ctr"/>
           <a:lstStyle/>
           <a:p>
             <a:pPr algn="ctr" indent="0" marL="0">
@@ -2322,7 +2322,7 @@
           <a:ln/>
         </p:spPr>
         <p:txBody>
-          <a:bodyPr wrap="square" lIns="0" tIns="0" rIns="0" bIns="0" rtlCol="0" anchor="ctr"/>
+          <a:bodyPr wrap="none" lIns="0" tIns="0" rIns="0" bIns="0" rtlCol="0" anchor="ctr"/>
           <a:lstStyle/>
           <a:p>
             <a:pPr algn="ctr" indent="0" marL="0">
@@ -2365,7 +2365,7 @@
           <a:ln/>
         </p:spPr>
         <p:txBody>
-          <a:bodyPr wrap="square" lIns="0" tIns="0" rIns="0" bIns="0" rtlCol="0" anchor="ctr"/>
+          <a:bodyPr wrap="none" lIns="0" tIns="0" rIns="0" bIns="0" rtlCol="0" anchor="ctr"/>
           <a:lstStyle/>
           <a:p>
             <a:pPr algn="ctr" indent="0" marL="0">
@@ -2408,7 +2408,7 @@
           <a:ln/>
         </p:spPr>
         <p:txBody>
-          <a:bodyPr wrap="square" lIns="0" tIns="0" rIns="0" bIns="0" rtlCol="0" anchor="ctr"/>
+          <a:bodyPr wrap="none" lIns="0" tIns="0" rIns="0" bIns="0" rtlCol="0" anchor="ctr"/>
           <a:lstStyle/>
           <a:p>
             <a:pPr algn="ctr" indent="0" marL="0">
@@ -2813,7 +2813,7 @@
           <a:ln/>
         </p:spPr>
         <p:txBody>
-          <a:bodyPr wrap="square" lIns="0" tIns="0" rIns="0" bIns="0" rtlCol="0" anchor="ctr"/>
+          <a:bodyPr wrap="none" lIns="0" tIns="0" rIns="0" bIns="0" rtlCol="0" anchor="ctr"/>
           <a:lstStyle/>
           <a:p>
             <a:pPr algn="ctr" indent="0" marL="0">
@@ -2856,7 +2856,7 @@
           <a:ln/>
         </p:spPr>
         <p:txBody>
-          <a:bodyPr wrap="square" lIns="0" tIns="0" rIns="0" bIns="0" rtlCol="0" anchor="ctr"/>
+          <a:bodyPr wrap="none" lIns="0" tIns="0" rIns="0" bIns="0" rtlCol="0" anchor="ctr"/>
           <a:lstStyle/>
           <a:p>
             <a:pPr algn="ctr" indent="0" marL="0">
@@ -2899,7 +2899,7 @@
           <a:ln/>
         </p:spPr>
         <p:txBody>
-          <a:bodyPr wrap="square" lIns="0" tIns="0" rIns="0" bIns="0" rtlCol="0" anchor="ctr"/>
+          <a:bodyPr wrap="none" lIns="0" tIns="0" rIns="0" bIns="0" rtlCol="0" anchor="ctr"/>
           <a:lstStyle/>
           <a:p>
             <a:pPr algn="ctr" indent="0" marL="0">
@@ -2942,7 +2942,7 @@
           <a:ln/>
         </p:spPr>
         <p:txBody>
-          <a:bodyPr wrap="square" lIns="0" tIns="0" rIns="0" bIns="0" rtlCol="0" anchor="ctr"/>
+          <a:bodyPr wrap="none" lIns="0" tIns="0" rIns="0" bIns="0" rtlCol="0" anchor="ctr"/>
           <a:lstStyle/>
           <a:p>
             <a:pPr algn="ctr" indent="0" marL="0">
@@ -2985,7 +2985,7 @@
           <a:ln/>
         </p:spPr>
         <p:txBody>
-          <a:bodyPr wrap="square" lIns="0" tIns="0" rIns="0" bIns="0" rtlCol="0" anchor="ctr"/>
+          <a:bodyPr wrap="none" lIns="0" tIns="0" rIns="0" bIns="0" rtlCol="0" anchor="ctr"/>
           <a:lstStyle/>
           <a:p>
             <a:pPr algn="ctr" indent="0" marL="0">
@@ -3728,7 +3728,7 @@
           <a:ln/>
         </p:spPr>
         <p:txBody>
-          <a:bodyPr wrap="square" lIns="0" tIns="0" rIns="0" bIns="0" rtlCol="0" anchor="ctr"/>
+          <a:bodyPr wrap="none" lIns="0" tIns="0" rIns="0" bIns="0" rtlCol="0" anchor="ctr"/>
           <a:lstStyle/>
           <a:p>
             <a:pPr algn="ctr" indent="0" marL="0">
@@ -3771,7 +3771,7 @@
           <a:ln/>
         </p:spPr>
         <p:txBody>
-          <a:bodyPr wrap="square" lIns="0" tIns="0" rIns="0" bIns="0" rtlCol="0" anchor="ctr"/>
+          <a:bodyPr wrap="none" lIns="0" tIns="0" rIns="0" bIns="0" rtlCol="0" anchor="ctr"/>
           <a:lstStyle/>
           <a:p>
             <a:pPr algn="ctr" indent="0" marL="0">
@@ -3814,7 +3814,7 @@
           <a:ln/>
         </p:spPr>
         <p:txBody>
-          <a:bodyPr wrap="square" lIns="0" tIns="0" rIns="0" bIns="0" rtlCol="0" anchor="ctr"/>
+          <a:bodyPr wrap="none" lIns="0" tIns="0" rIns="0" bIns="0" rtlCol="0" anchor="ctr"/>
           <a:lstStyle/>
           <a:p>
             <a:pPr algn="ctr" indent="0" marL="0">
@@ -3857,7 +3857,7 @@
           <a:ln/>
         </p:spPr>
         <p:txBody>
-          <a:bodyPr wrap="square" lIns="0" tIns="0" rIns="0" bIns="0" rtlCol="0" anchor="ctr"/>
+          <a:bodyPr wrap="none" lIns="0" tIns="0" rIns="0" bIns="0" rtlCol="0" anchor="ctr"/>
           <a:lstStyle/>
           <a:p>
             <a:pPr algn="ctr" indent="0" marL="0">
@@ -3900,7 +3900,7 @@
           <a:ln/>
         </p:spPr>
         <p:txBody>
-          <a:bodyPr wrap="square" lIns="0" tIns="0" rIns="0" bIns="0" rtlCol="0" anchor="ctr"/>
+          <a:bodyPr wrap="none" lIns="0" tIns="0" rIns="0" bIns="0" rtlCol="0" anchor="ctr"/>
           <a:lstStyle/>
           <a:p>
             <a:pPr algn="ctr" indent="0" marL="0">
@@ -4693,7 +4693,7 @@
           <a:ln/>
         </p:spPr>
         <p:txBody>
-          <a:bodyPr wrap="square" lIns="0" tIns="0" rIns="0" bIns="0" rtlCol="0" anchor="ctr"/>
+          <a:bodyPr wrap="none" lIns="0" tIns="0" rIns="0" bIns="0" rtlCol="0" anchor="ctr"/>
           <a:lstStyle/>
           <a:p>
             <a:pPr algn="ctr" indent="0" marL="0">
@@ -4736,7 +4736,7 @@
           <a:ln/>
         </p:spPr>
         <p:txBody>
-          <a:bodyPr wrap="square" lIns="0" tIns="0" rIns="0" bIns="0" rtlCol="0" anchor="ctr"/>
+          <a:bodyPr wrap="none" lIns="0" tIns="0" rIns="0" bIns="0" rtlCol="0" anchor="ctr"/>
           <a:lstStyle/>
           <a:p>
             <a:pPr algn="ctr" indent="0" marL="0">
@@ -4779,7 +4779,7 @@
           <a:ln/>
         </p:spPr>
         <p:txBody>
-          <a:bodyPr wrap="square" lIns="0" tIns="0" rIns="0" bIns="0" rtlCol="0" anchor="ctr"/>
+          <a:bodyPr wrap="none" lIns="0" tIns="0" rIns="0" bIns="0" rtlCol="0" anchor="ctr"/>
           <a:lstStyle/>
           <a:p>
             <a:pPr algn="ctr" indent="0" marL="0">
@@ -4822,7 +4822,7 @@
           <a:ln/>
         </p:spPr>
         <p:txBody>
-          <a:bodyPr wrap="square" lIns="0" tIns="0" rIns="0" bIns="0" rtlCol="0" anchor="ctr"/>
+          <a:bodyPr wrap="none" lIns="0" tIns="0" rIns="0" bIns="0" rtlCol="0" anchor="ctr"/>
           <a:lstStyle/>
           <a:p>
             <a:pPr algn="ctr" indent="0" marL="0">
@@ -4865,7 +4865,7 @@
           <a:ln/>
         </p:spPr>
         <p:txBody>
-          <a:bodyPr wrap="square" lIns="0" tIns="0" rIns="0" bIns="0" rtlCol="0" anchor="ctr"/>
+          <a:bodyPr wrap="none" lIns="0" tIns="0" rIns="0" bIns="0" rtlCol="0" anchor="ctr"/>
           <a:lstStyle/>
           <a:p>
             <a:pPr algn="ctr" indent="0" marL="0">
@@ -6445,7 +6445,7 @@
           <a:ln/>
         </p:spPr>
         <p:txBody>
-          <a:bodyPr wrap="square" lIns="0" tIns="0" rIns="0" bIns="0" rtlCol="0" anchor="ctr"/>
+          <a:bodyPr wrap="none" lIns="0" tIns="0" rIns="0" bIns="0" rtlCol="0" anchor="ctr"/>
           <a:lstStyle/>
           <a:p>
             <a:pPr algn="ctr" indent="0" marL="0">
@@ -6488,7 +6488,7 @@
           <a:ln/>
         </p:spPr>
         <p:txBody>
-          <a:bodyPr wrap="square" lIns="0" tIns="0" rIns="0" bIns="0" rtlCol="0" anchor="ctr"/>
+          <a:bodyPr wrap="none" lIns="0" tIns="0" rIns="0" bIns="0" rtlCol="0" anchor="ctr"/>
           <a:lstStyle/>
           <a:p>
             <a:pPr algn="ctr" indent="0" marL="0">
@@ -6531,7 +6531,7 @@
           <a:ln/>
         </p:spPr>
         <p:txBody>
-          <a:bodyPr wrap="square" lIns="0" tIns="0" rIns="0" bIns="0" rtlCol="0" anchor="ctr"/>
+          <a:bodyPr wrap="none" lIns="0" tIns="0" rIns="0" bIns="0" rtlCol="0" anchor="ctr"/>
           <a:lstStyle/>
           <a:p>
             <a:pPr algn="ctr" indent="0" marL="0">
@@ -6574,7 +6574,7 @@
           <a:ln/>
         </p:spPr>
         <p:txBody>
-          <a:bodyPr wrap="square" lIns="0" tIns="0" rIns="0" bIns="0" rtlCol="0" anchor="ctr"/>
+          <a:bodyPr wrap="none" lIns="0" tIns="0" rIns="0" bIns="0" rtlCol="0" anchor="ctr"/>
           <a:lstStyle/>
           <a:p>
             <a:pPr algn="ctr" indent="0" marL="0">
@@ -6617,7 +6617,7 @@
           <a:ln/>
         </p:spPr>
         <p:txBody>
-          <a:bodyPr wrap="square" lIns="0" tIns="0" rIns="0" bIns="0" rtlCol="0" anchor="ctr"/>
+          <a:bodyPr wrap="none" lIns="0" tIns="0" rIns="0" bIns="0" rtlCol="0" anchor="ctr"/>
           <a:lstStyle/>
           <a:p>
             <a:pPr algn="ctr" indent="0" marL="0">
@@ -8300,7 +8300,7 @@
           <a:ln/>
         </p:spPr>
         <p:txBody>
-          <a:bodyPr wrap="square" lIns="0" tIns="0" rIns="0" bIns="0" rtlCol="0" anchor="ctr"/>
+          <a:bodyPr wrap="none" lIns="0" tIns="0" rIns="0" bIns="0" rtlCol="0" anchor="ctr"/>
           <a:lstStyle/>
           <a:p>
             <a:pPr algn="ctr" indent="0" marL="0">
@@ -8343,7 +8343,7 @@
           <a:ln/>
         </p:spPr>
         <p:txBody>
-          <a:bodyPr wrap="square" lIns="0" tIns="0" rIns="0" bIns="0" rtlCol="0" anchor="ctr"/>
+          <a:bodyPr wrap="none" lIns="0" tIns="0" rIns="0" bIns="0" rtlCol="0" anchor="ctr"/>
           <a:lstStyle/>
           <a:p>
             <a:pPr algn="ctr" indent="0" marL="0">
@@ -8386,7 +8386,7 @@
           <a:ln/>
         </p:spPr>
         <p:txBody>
-          <a:bodyPr wrap="square" lIns="0" tIns="0" rIns="0" bIns="0" rtlCol="0" anchor="ctr"/>
+          <a:bodyPr wrap="none" lIns="0" tIns="0" rIns="0" bIns="0" rtlCol="0" anchor="ctr"/>
           <a:lstStyle/>
           <a:p>
             <a:pPr algn="ctr" indent="0" marL="0">
@@ -8429,7 +8429,7 @@
           <a:ln/>
         </p:spPr>
         <p:txBody>
-          <a:bodyPr wrap="square" lIns="0" tIns="0" rIns="0" bIns="0" rtlCol="0" anchor="ctr"/>
+          <a:bodyPr wrap="none" lIns="0" tIns="0" rIns="0" bIns="0" rtlCol="0" anchor="ctr"/>
           <a:lstStyle/>
           <a:p>
             <a:pPr algn="ctr" indent="0" marL="0">
@@ -8472,7 +8472,7 @@
           <a:ln/>
         </p:spPr>
         <p:txBody>
-          <a:bodyPr wrap="square" lIns="0" tIns="0" rIns="0" bIns="0" rtlCol="0" anchor="ctr"/>
+          <a:bodyPr wrap="none" lIns="0" tIns="0" rIns="0" bIns="0" rtlCol="0" anchor="ctr"/>
           <a:lstStyle/>
           <a:p>
             <a:pPr algn="ctr" indent="0" marL="0">
@@ -9120,7 +9120,7 @@
           <a:ln/>
         </p:spPr>
         <p:txBody>
-          <a:bodyPr wrap="square" lIns="0" tIns="0" rIns="0" bIns="0" rtlCol="0" anchor="ctr"/>
+          <a:bodyPr wrap="none" lIns="0" tIns="0" rIns="0" bIns="0" rtlCol="0" anchor="ctr"/>
           <a:lstStyle/>
           <a:p>
             <a:pPr algn="ctr" indent="0" marL="0">
@@ -9163,7 +9163,7 @@
           <a:ln/>
         </p:spPr>
         <p:txBody>
-          <a:bodyPr wrap="square" lIns="0" tIns="0" rIns="0" bIns="0" rtlCol="0" anchor="ctr"/>
+          <a:bodyPr wrap="none" lIns="0" tIns="0" rIns="0" bIns="0" rtlCol="0" anchor="ctr"/>
           <a:lstStyle/>
           <a:p>
             <a:pPr algn="ctr" indent="0" marL="0">
@@ -9206,7 +9206,7 @@
           <a:ln/>
         </p:spPr>
         <p:txBody>
-          <a:bodyPr wrap="square" lIns="0" tIns="0" rIns="0" bIns="0" rtlCol="0" anchor="ctr"/>
+          <a:bodyPr wrap="none" lIns="0" tIns="0" rIns="0" bIns="0" rtlCol="0" anchor="ctr"/>
           <a:lstStyle/>
           <a:p>
             <a:pPr algn="ctr" indent="0" marL="0">
@@ -9249,7 +9249,7 @@
           <a:ln/>
         </p:spPr>
         <p:txBody>
-          <a:bodyPr wrap="square" lIns="0" tIns="0" rIns="0" bIns="0" rtlCol="0" anchor="ctr"/>
+          <a:bodyPr wrap="none" lIns="0" tIns="0" rIns="0" bIns="0" rtlCol="0" anchor="ctr"/>
           <a:lstStyle/>
           <a:p>
             <a:pPr algn="ctr" indent="0" marL="0">
@@ -9292,7 +9292,7 @@
           <a:ln/>
         </p:spPr>
         <p:txBody>
-          <a:bodyPr wrap="square" lIns="0" tIns="0" rIns="0" bIns="0" rtlCol="0" anchor="ctr"/>
+          <a:bodyPr wrap="none" lIns="0" tIns="0" rIns="0" bIns="0" rtlCol="0" anchor="ctr"/>
           <a:lstStyle/>
           <a:p>
             <a:pPr algn="ctr" indent="0" marL="0">
@@ -10016,7 +10016,7 @@
           <a:ln/>
         </p:spPr>
         <p:txBody>
-          <a:bodyPr wrap="square" lIns="0" tIns="0" rIns="0" bIns="0" rtlCol="0" anchor="ctr"/>
+          <a:bodyPr wrap="none" lIns="0" tIns="0" rIns="0" bIns="0" rtlCol="0" anchor="ctr"/>
           <a:lstStyle/>
           <a:p>
             <a:pPr algn="ctr" indent="0" marL="0">
@@ -10059,7 +10059,7 @@
           <a:ln/>
         </p:spPr>
         <p:txBody>
-          <a:bodyPr wrap="square" lIns="0" tIns="0" rIns="0" bIns="0" rtlCol="0" anchor="ctr"/>
+          <a:bodyPr wrap="none" lIns="0" tIns="0" rIns="0" bIns="0" rtlCol="0" anchor="ctr"/>
           <a:lstStyle/>
           <a:p>
             <a:pPr algn="ctr" indent="0" marL="0">
@@ -10102,7 +10102,7 @@
           <a:ln/>
         </p:spPr>
         <p:txBody>
-          <a:bodyPr wrap="square" lIns="0" tIns="0" rIns="0" bIns="0" rtlCol="0" anchor="ctr"/>
+          <a:bodyPr wrap="none" lIns="0" tIns="0" rIns="0" bIns="0" rtlCol="0" anchor="ctr"/>
           <a:lstStyle/>
           <a:p>
             <a:pPr algn="ctr" indent="0" marL="0">
@@ -10145,7 +10145,7 @@
           <a:ln/>
         </p:spPr>
         <p:txBody>
-          <a:bodyPr wrap="square" lIns="0" tIns="0" rIns="0" bIns="0" rtlCol="0" anchor="ctr"/>
+          <a:bodyPr wrap="none" lIns="0" tIns="0" rIns="0" bIns="0" rtlCol="0" anchor="ctr"/>
           <a:lstStyle/>
           <a:p>
             <a:pPr algn="ctr" indent="0" marL="0">
@@ -10188,7 +10188,7 @@
           <a:ln/>
         </p:spPr>
         <p:txBody>
-          <a:bodyPr wrap="square" lIns="0" tIns="0" rIns="0" bIns="0" rtlCol="0" anchor="ctr"/>
+          <a:bodyPr wrap="none" lIns="0" tIns="0" rIns="0" bIns="0" rtlCol="0" anchor="ctr"/>
           <a:lstStyle/>
           <a:p>
             <a:pPr algn="ctr" indent="0" marL="0">
@@ -10933,7 +10933,7 @@
           <a:ln/>
         </p:spPr>
         <p:txBody>
-          <a:bodyPr wrap="square" lIns="0" tIns="0" rIns="0" bIns="0" rtlCol="0" anchor="ctr"/>
+          <a:bodyPr wrap="none" lIns="0" tIns="0" rIns="0" bIns="0" rtlCol="0" anchor="ctr"/>
           <a:lstStyle/>
           <a:p>
             <a:pPr algn="ctr" indent="0" marL="0">
@@ -10976,7 +10976,7 @@
           <a:ln/>
         </p:spPr>
         <p:txBody>
-          <a:bodyPr wrap="square" lIns="0" tIns="0" rIns="0" bIns="0" rtlCol="0" anchor="ctr"/>
+          <a:bodyPr wrap="none" lIns="0" tIns="0" rIns="0" bIns="0" rtlCol="0" anchor="ctr"/>
           <a:lstStyle/>
           <a:p>
             <a:pPr algn="ctr" indent="0" marL="0">
@@ -11019,7 +11019,7 @@
           <a:ln/>
         </p:spPr>
         <p:txBody>
-          <a:bodyPr wrap="square" lIns="0" tIns="0" rIns="0" bIns="0" rtlCol="0" anchor="ctr"/>
+          <a:bodyPr wrap="none" lIns="0" tIns="0" rIns="0" bIns="0" rtlCol="0" anchor="ctr"/>
           <a:lstStyle/>
           <a:p>
             <a:pPr algn="ctr" indent="0" marL="0">
@@ -11062,7 +11062,7 @@
           <a:ln/>
         </p:spPr>
         <p:txBody>
-          <a:bodyPr wrap="square" lIns="0" tIns="0" rIns="0" bIns="0" rtlCol="0" anchor="ctr"/>
+          <a:bodyPr wrap="none" lIns="0" tIns="0" rIns="0" bIns="0" rtlCol="0" anchor="ctr"/>
           <a:lstStyle/>
           <a:p>
             <a:pPr algn="ctr" indent="0" marL="0">
@@ -11105,7 +11105,7 @@
           <a:ln/>
         </p:spPr>
         <p:txBody>
-          <a:bodyPr wrap="square" lIns="0" tIns="0" rIns="0" bIns="0" rtlCol="0" anchor="ctr"/>
+          <a:bodyPr wrap="none" lIns="0" tIns="0" rIns="0" bIns="0" rtlCol="0" anchor="ctr"/>
           <a:lstStyle/>
           <a:p>
             <a:pPr algn="ctr" indent="0" marL="0">
